--- a/dist/초2/국어/기초문해/초2_국어_기초문해_03_짧은글읽고내용확인.pptx
+++ b/dist/초2/국어/기초문해/초2_국어_기초문해_03_짧은글읽고내용확인.pptx
@@ -119,45 +119,45 @@
   <p:extLst>
     <p:ext uri="{521415D9-36F7-43E2-AB2F-B90AF26B5E84}">
       <p14:sectionLst xmlns:p14="http://schemas.microsoft.com/office/powerpoint/2010/main">
-        <p14:section name="도입" id="{ecf93036-2f18-b2a8-e54c-3c058effb274}">
+        <p14:section name="도입" id="{04d50492-e080-036a-e5a4-81baa13907cc}">
           <p14:sldIdLst>
             <p14:sldId id="256"/>
             <p14:sldId id="257"/>
           </p14:sldIdLst>
         </p14:section>
-        <p14:section name="개념" id="{9bc64f6a-3130-8a43-5f83-ca17439b92a2}">
+        <p14:section name="개념" id="{c45c503c-f57c-9b16-01e6-6703d3e93a9b}">
           <p14:sldIdLst>
             <p14:sldId id="258"/>
             <p14:sldId id="260"/>
             <p14:sldId id="261"/>
           </p14:sldIdLst>
         </p14:section>
-        <p14:section name="연습" id="{aa361a4a-724b-83be-8dbe-2386a826f355}">
+        <p14:section name="연습" id="{f8a4e646-0a69-9d63-4789-7d6677be1763}">
           <p14:sldIdLst>
             <p14:sldId id="259"/>
             <p14:sldId id="262"/>
             <p14:sldId id="263"/>
           </p14:sldIdLst>
         </p14:section>
-        <p14:section name="개념" id="{f7faf2ad-aaeb-96e2-0afb-8478a011a4fc}">
+        <p14:section name="개념" id="{69d0ffc7-0a45-e29e-ed72-905d4125fd1e}">
           <p14:sldIdLst/>
         </p14:section>
-        <p14:section name="연습" id="{5bdd87d0-c907-bd90-9885-6033b4e2f9e9}">
+        <p14:section name="연습" id="{e717204e-b88c-e0a9-0527-63c75c264cd6}">
           <p14:sldIdLst/>
         </p14:section>
-        <p14:section name="확인" id="{e0ff5ef9-dc2d-31a4-c4e5-44cdf9aee329}">
+        <p14:section name="확인" id="{a3b58da6-f282-9149-395a-cac3b89fd06c}">
           <p14:sldIdLst>
             <p14:sldId id="264"/>
             <p14:sldId id="265"/>
             <p14:sldId id="266"/>
           </p14:sldIdLst>
         </p14:section>
-        <p14:section name="정리" id="{707e0dbd-e47c-8ba0-7263-20ac856df63c}">
+        <p14:section name="정리" id="{d64fe287-5579-7f35-3010-8cb986642b2c}">
           <p14:sldIdLst>
             <p14:sldId id="267"/>
           </p14:sldIdLst>
         </p14:section>
-        <p14:section name="보충" id="{93228d22-bd5f-4384-ef0b-4ccfb296b4e1}">
+        <p14:section name="보충" id="{c121e647-7d5f-d4a1-6fff-9f4babcbd8e5}">
           <p14:sldIdLst>
             <p14:sldId id="268"/>
           </p14:sldIdLst>
@@ -574,6 +574,8 @@
 - “오늘은 글을 또박또박 읽고, 누가 무엇을 어떻게 했는지 글에서 찾는 방법을 배울 거야.”
 예상 답
 - “다시 읽어 봐요.” “잘 모르겠어요.”
+막히면
+- 최근에 읽은 그림책을 떠올리게 하고 “누가 나왔어?”라고 물어봅니다.
 주의
 - 어떤 답이든 고치지 말고 들어 둡니다.</a:t>
             </a:r>
@@ -868,7 +870,9 @@
 예상 답
 - “글을 잘 읽고, 누가 무엇을 했는지 글에서 찾아요.”
 정답
-- ① 그 일을 한 사람이나 동물 ② 잠깐 쉬어요 ③ 하는 모습이나 방법</a:t>
+- ① 그 일을 한 사람이나 동물 ② 잠깐 쉬어요 ③ 하는 모습이나 방법
+막히면
+- S03의 순서와 S06의 카드를 다시 보여 줍니다.</a:t>
             </a:r>
             <a:endParaRPr lang="en-US" dirty="0"/>
           </a:p>

--- a/dist/초2/국어/기초문해/초2_국어_기초문해_03_짧은글읽고내용확인.pptx
+++ b/dist/초2/국어/기초문해/초2_국어_기초문해_03_짧은글읽고내용확인.pptx
@@ -119,45 +119,45 @@
   <p:extLst>
     <p:ext uri="{521415D9-36F7-43E2-AB2F-B90AF26B5E84}">
       <p14:sectionLst xmlns:p14="http://schemas.microsoft.com/office/powerpoint/2010/main">
-        <p14:section name="도입" id="{04d50492-e080-036a-e5a4-81baa13907cc}">
+        <p14:section name="도입" id="{2b198760-761f-80be-affb-9d4e51c31219}">
           <p14:sldIdLst>
             <p14:sldId id="256"/>
             <p14:sldId id="257"/>
           </p14:sldIdLst>
         </p14:section>
-        <p14:section name="개념" id="{c45c503c-f57c-9b16-01e6-6703d3e93a9b}">
+        <p14:section name="개념" id="{2d24e503-5730-4422-f350-39f5eb3a3208}">
           <p14:sldIdLst>
             <p14:sldId id="258"/>
             <p14:sldId id="260"/>
             <p14:sldId id="261"/>
           </p14:sldIdLst>
         </p14:section>
-        <p14:section name="연습" id="{f8a4e646-0a69-9d63-4789-7d6677be1763}">
+        <p14:section name="연습" id="{d62ca2f7-9ec0-6d63-b51f-a8836c13f294}">
           <p14:sldIdLst>
             <p14:sldId id="259"/>
             <p14:sldId id="262"/>
             <p14:sldId id="263"/>
           </p14:sldIdLst>
         </p14:section>
-        <p14:section name="개념" id="{69d0ffc7-0a45-e29e-ed72-905d4125fd1e}">
+        <p14:section name="개념" id="{2d9b5ac7-5814-dfb7-858a-73b66a1883db}">
           <p14:sldIdLst/>
         </p14:section>
-        <p14:section name="연습" id="{e717204e-b88c-e0a9-0527-63c75c264cd6}">
+        <p14:section name="연습" id="{01239733-9892-596f-bc82-85529be08333}">
           <p14:sldIdLst/>
         </p14:section>
-        <p14:section name="확인" id="{a3b58da6-f282-9149-395a-cac3b89fd06c}">
+        <p14:section name="확인" id="{5dab403c-cba3-ea3b-0cbf-6a51cc25a9df}">
           <p14:sldIdLst>
             <p14:sldId id="264"/>
             <p14:sldId id="265"/>
             <p14:sldId id="266"/>
           </p14:sldIdLst>
         </p14:section>
-        <p14:section name="정리" id="{d64fe287-5579-7f35-3010-8cb986642b2c}">
+        <p14:section name="정리" id="{7230f073-5530-9e6e-78ed-0427eb80c3d8}">
           <p14:sldIdLst>
             <p14:sldId id="267"/>
           </p14:sldIdLst>
         </p14:section>
-        <p14:section name="보충" id="{c121e647-7d5f-d4a1-6fff-9f4babcbd8e5}">
+        <p14:section name="보충" id="{fa541e08-01cb-e60d-6f63-55ecc77b16e6}">
           <p14:sldIdLst>
             <p14:sldId id="268"/>
           </p14:sldIdLst>
